--- a/Semana09_18MAY26/Work.pptx
+++ b/Semana09_18MAY26/Work.pptx
@@ -6,8 +6,9 @@
   </p:sldMasterIdLst>
   <p:sldIdLst>
     <p:sldId id="256" r:id="rId2"/>
-    <p:sldId id="257" r:id="rId3"/>
-    <p:sldId id="258" r:id="rId4"/>
+    <p:sldId id="259" r:id="rId3"/>
+    <p:sldId id="257" r:id="rId4"/>
+    <p:sldId id="258" r:id="rId5"/>
   </p:sldIdLst>
   <p:sldSz cx="12192000" cy="6858000"/>
   <p:notesSz cx="6858000" cy="9144000"/>
@@ -261,7 +262,7 @@
           <a:p>
             <a:fld id="{7DD0A3E1-C9EC-4285-A7EA-81A27F5AB0EA}" type="datetimeFigureOut">
               <a:rPr lang="es-ES" smtClean="0"/>
-              <a:t>01/05/2026</a:t>
+              <a:t>19/05/2026</a:t>
             </a:fld>
             <a:endParaRPr lang="es-ES"/>
           </a:p>
@@ -459,7 +460,7 @@
           <a:p>
             <a:fld id="{7DD0A3E1-C9EC-4285-A7EA-81A27F5AB0EA}" type="datetimeFigureOut">
               <a:rPr lang="es-ES" smtClean="0"/>
-              <a:t>01/05/2026</a:t>
+              <a:t>19/05/2026</a:t>
             </a:fld>
             <a:endParaRPr lang="es-ES"/>
           </a:p>
@@ -667,7 +668,7 @@
           <a:p>
             <a:fld id="{7DD0A3E1-C9EC-4285-A7EA-81A27F5AB0EA}" type="datetimeFigureOut">
               <a:rPr lang="es-ES" smtClean="0"/>
-              <a:t>01/05/2026</a:t>
+              <a:t>19/05/2026</a:t>
             </a:fld>
             <a:endParaRPr lang="es-ES"/>
           </a:p>
@@ -865,7 +866,7 @@
           <a:p>
             <a:fld id="{7DD0A3E1-C9EC-4285-A7EA-81A27F5AB0EA}" type="datetimeFigureOut">
               <a:rPr lang="es-ES" smtClean="0"/>
-              <a:t>01/05/2026</a:t>
+              <a:t>19/05/2026</a:t>
             </a:fld>
             <a:endParaRPr lang="es-ES"/>
           </a:p>
@@ -1140,7 +1141,7 @@
           <a:p>
             <a:fld id="{7DD0A3E1-C9EC-4285-A7EA-81A27F5AB0EA}" type="datetimeFigureOut">
               <a:rPr lang="es-ES" smtClean="0"/>
-              <a:t>01/05/2026</a:t>
+              <a:t>19/05/2026</a:t>
             </a:fld>
             <a:endParaRPr lang="es-ES"/>
           </a:p>
@@ -1405,7 +1406,7 @@
           <a:p>
             <a:fld id="{7DD0A3E1-C9EC-4285-A7EA-81A27F5AB0EA}" type="datetimeFigureOut">
               <a:rPr lang="es-ES" smtClean="0"/>
-              <a:t>01/05/2026</a:t>
+              <a:t>19/05/2026</a:t>
             </a:fld>
             <a:endParaRPr lang="es-ES"/>
           </a:p>
@@ -1817,7 +1818,7 @@
           <a:p>
             <a:fld id="{7DD0A3E1-C9EC-4285-A7EA-81A27F5AB0EA}" type="datetimeFigureOut">
               <a:rPr lang="es-ES" smtClean="0"/>
-              <a:t>01/05/2026</a:t>
+              <a:t>19/05/2026</a:t>
             </a:fld>
             <a:endParaRPr lang="es-ES"/>
           </a:p>
@@ -1958,7 +1959,7 @@
           <a:p>
             <a:fld id="{7DD0A3E1-C9EC-4285-A7EA-81A27F5AB0EA}" type="datetimeFigureOut">
               <a:rPr lang="es-ES" smtClean="0"/>
-              <a:t>01/05/2026</a:t>
+              <a:t>19/05/2026</a:t>
             </a:fld>
             <a:endParaRPr lang="es-ES"/>
           </a:p>
@@ -2071,7 +2072,7 @@
           <a:p>
             <a:fld id="{7DD0A3E1-C9EC-4285-A7EA-81A27F5AB0EA}" type="datetimeFigureOut">
               <a:rPr lang="es-ES" smtClean="0"/>
-              <a:t>01/05/2026</a:t>
+              <a:t>19/05/2026</a:t>
             </a:fld>
             <a:endParaRPr lang="es-ES"/>
           </a:p>
@@ -2382,7 +2383,7 @@
           <a:p>
             <a:fld id="{7DD0A3E1-C9EC-4285-A7EA-81A27F5AB0EA}" type="datetimeFigureOut">
               <a:rPr lang="es-ES" smtClean="0"/>
-              <a:t>01/05/2026</a:t>
+              <a:t>19/05/2026</a:t>
             </a:fld>
             <a:endParaRPr lang="es-ES"/>
           </a:p>
@@ -2670,7 +2671,7 @@
           <a:p>
             <a:fld id="{7DD0A3E1-C9EC-4285-A7EA-81A27F5AB0EA}" type="datetimeFigureOut">
               <a:rPr lang="es-ES" smtClean="0"/>
-              <a:t>01/05/2026</a:t>
+              <a:t>19/05/2026</a:t>
             </a:fld>
             <a:endParaRPr lang="es-ES"/>
           </a:p>
@@ -2911,7 +2912,7 @@
           <a:p>
             <a:fld id="{7DD0A3E1-C9EC-4285-A7EA-81A27F5AB0EA}" type="datetimeFigureOut">
               <a:rPr lang="es-ES" smtClean="0"/>
-              <a:t>01/05/2026</a:t>
+              <a:t>19/05/2026</a:t>
             </a:fld>
             <a:endParaRPr lang="es-ES"/>
           </a:p>
@@ -3708,6 +3709,390 @@
   <p:cSld>
     <p:spTree>
       <p:nvGrpSpPr>
+        <p:cNvPr id="1" name=""/>
+        <p:cNvGrpSpPr/>
+        <p:nvPr/>
+      </p:nvGrpSpPr>
+      <p:grpSpPr>
+        <a:xfrm>
+          <a:off x="0" y="0"/>
+          <a:ext cx="0" cy="0"/>
+          <a:chOff x="0" y="0"/>
+          <a:chExt cx="0" cy="0"/>
+        </a:xfrm>
+      </p:grpSpPr>
+      <p:pic>
+        <p:nvPicPr>
+          <p:cNvPr id="5" name="Imagen 4">
+            <a:extLst>
+              <a:ext uri="{FF2B5EF4-FFF2-40B4-BE49-F238E27FC236}">
+                <a16:creationId xmlns:a16="http://schemas.microsoft.com/office/drawing/2014/main" id="{F4BFA606-EB22-E1B1-08B4-D5EBE2A7249E}"/>
+              </a:ext>
+            </a:extLst>
+          </p:cNvPr>
+          <p:cNvPicPr>
+            <a:picLocks noChangeAspect="1"/>
+          </p:cNvPicPr>
+          <p:nvPr/>
+        </p:nvPicPr>
+        <p:blipFill>
+          <a:blip r:embed="rId2"/>
+          <a:stretch>
+            <a:fillRect/>
+          </a:stretch>
+        </p:blipFill>
+        <p:spPr>
+          <a:xfrm>
+            <a:off x="3821638" y="3297332"/>
+            <a:ext cx="1406455" cy="887408"/>
+          </a:xfrm>
+          <a:prstGeom prst="rect">
+            <a:avLst/>
+          </a:prstGeom>
+        </p:spPr>
+      </p:pic>
+      <p:sp>
+        <p:nvSpPr>
+          <p:cNvPr id="6" name="Rectángulo 5">
+            <a:extLst>
+              <a:ext uri="{FF2B5EF4-FFF2-40B4-BE49-F238E27FC236}">
+                <a16:creationId xmlns:a16="http://schemas.microsoft.com/office/drawing/2014/main" id="{FC3C6C9B-79C4-F435-3E6B-097BDA2D98DD}"/>
+              </a:ext>
+            </a:extLst>
+          </p:cNvPr>
+          <p:cNvSpPr/>
+          <p:nvPr/>
+        </p:nvSpPr>
+        <p:spPr>
+          <a:xfrm>
+            <a:off x="3933739" y="1229103"/>
+            <a:ext cx="3306618" cy="1775691"/>
+          </a:xfrm>
+          <a:prstGeom prst="rect">
+            <a:avLst/>
+          </a:prstGeom>
+        </p:spPr>
+        <p:style>
+          <a:lnRef idx="2">
+            <a:schemeClr val="accent1">
+              <a:shade val="15000"/>
+            </a:schemeClr>
+          </a:lnRef>
+          <a:fillRef idx="1">
+            <a:schemeClr val="accent1"/>
+          </a:fillRef>
+          <a:effectRef idx="0">
+            <a:schemeClr val="accent1"/>
+          </a:effectRef>
+          <a:fontRef idx="minor">
+            <a:schemeClr val="lt1"/>
+          </a:fontRef>
+        </p:style>
+        <p:txBody>
+          <a:bodyPr rtlCol="0" anchor="ctr"/>
+          <a:lstStyle/>
+          <a:p>
+            <a:pPr algn="ctr"/>
+            <a:r>
+              <a:rPr lang="es-ES" dirty="0"/>
+              <a:t>Service</a:t>
+            </a:r>
+          </a:p>
+        </p:txBody>
+      </p:sp>
+      <p:sp>
+        <p:nvSpPr>
+          <p:cNvPr id="7" name="Flecha: a la derecha 6">
+            <a:extLst>
+              <a:ext uri="{FF2B5EF4-FFF2-40B4-BE49-F238E27FC236}">
+                <a16:creationId xmlns:a16="http://schemas.microsoft.com/office/drawing/2014/main" id="{8DCFF65B-82C8-6CA3-D527-BAACAA3D156F}"/>
+              </a:ext>
+            </a:extLst>
+          </p:cNvPr>
+          <p:cNvSpPr/>
+          <p:nvPr/>
+        </p:nvSpPr>
+        <p:spPr>
+          <a:xfrm>
+            <a:off x="2556256" y="1562766"/>
+            <a:ext cx="1265382" cy="1108364"/>
+          </a:xfrm>
+          <a:prstGeom prst="rightArrow">
+            <a:avLst/>
+          </a:prstGeom>
+        </p:spPr>
+        <p:style>
+          <a:lnRef idx="2">
+            <a:schemeClr val="accent1">
+              <a:shade val="15000"/>
+            </a:schemeClr>
+          </a:lnRef>
+          <a:fillRef idx="1">
+            <a:schemeClr val="accent1"/>
+          </a:fillRef>
+          <a:effectRef idx="0">
+            <a:schemeClr val="accent1"/>
+          </a:effectRef>
+          <a:fontRef idx="minor">
+            <a:schemeClr val="lt1"/>
+          </a:fontRef>
+        </p:style>
+        <p:txBody>
+          <a:bodyPr rtlCol="0" anchor="ctr"/>
+          <a:lstStyle/>
+          <a:p>
+            <a:pPr algn="ctr"/>
+            <a:endParaRPr lang="es-ES"/>
+          </a:p>
+        </p:txBody>
+      </p:sp>
+      <p:sp>
+        <p:nvSpPr>
+          <p:cNvPr id="8" name="CuadroTexto 7">
+            <a:extLst>
+              <a:ext uri="{FF2B5EF4-FFF2-40B4-BE49-F238E27FC236}">
+                <a16:creationId xmlns:a16="http://schemas.microsoft.com/office/drawing/2014/main" id="{64ED5930-A93D-70B7-4166-51C937CAD3E3}"/>
+              </a:ext>
+            </a:extLst>
+          </p:cNvPr>
+          <p:cNvSpPr txBox="1"/>
+          <p:nvPr/>
+        </p:nvSpPr>
+        <p:spPr>
+          <a:xfrm>
+            <a:off x="1424858" y="1922815"/>
+            <a:ext cx="892424" cy="369332"/>
+          </a:xfrm>
+          <a:prstGeom prst="rect">
+            <a:avLst/>
+          </a:prstGeom>
+          <a:noFill/>
+        </p:spPr>
+        <p:txBody>
+          <a:bodyPr wrap="none" rtlCol="0">
+            <a:spAutoFit/>
+          </a:bodyPr>
+          <a:lstStyle/>
+          <a:p>
+            <a:r>
+              <a:rPr lang="es-ES" dirty="0" err="1"/>
+              <a:t>idCurso</a:t>
+            </a:r>
+            <a:endParaRPr lang="es-ES" dirty="0"/>
+          </a:p>
+        </p:txBody>
+      </p:sp>
+      <p:sp>
+        <p:nvSpPr>
+          <p:cNvPr id="9" name="Cilindro 8">
+            <a:extLst>
+              <a:ext uri="{FF2B5EF4-FFF2-40B4-BE49-F238E27FC236}">
+                <a16:creationId xmlns:a16="http://schemas.microsoft.com/office/drawing/2014/main" id="{DA6B89C5-9C04-AD46-F20A-423A0D16AF06}"/>
+              </a:ext>
+            </a:extLst>
+          </p:cNvPr>
+          <p:cNvSpPr/>
+          <p:nvPr/>
+        </p:nvSpPr>
+        <p:spPr>
+          <a:xfrm>
+            <a:off x="4261630" y="4644248"/>
+            <a:ext cx="2650836" cy="1209964"/>
+          </a:xfrm>
+          <a:prstGeom prst="can">
+            <a:avLst/>
+          </a:prstGeom>
+        </p:spPr>
+        <p:style>
+          <a:lnRef idx="2">
+            <a:schemeClr val="accent1">
+              <a:shade val="15000"/>
+            </a:schemeClr>
+          </a:lnRef>
+          <a:fillRef idx="1">
+            <a:schemeClr val="accent1"/>
+          </a:fillRef>
+          <a:effectRef idx="0">
+            <a:schemeClr val="accent1"/>
+          </a:effectRef>
+          <a:fontRef idx="minor">
+            <a:schemeClr val="lt1"/>
+          </a:fontRef>
+        </p:style>
+        <p:txBody>
+          <a:bodyPr rtlCol="0" anchor="ctr"/>
+          <a:lstStyle/>
+          <a:p>
+            <a:pPr algn="ctr"/>
+            <a:r>
+              <a:rPr lang="es-ES" sz="4800" dirty="0">
+                <a:ln w="76200">
+                  <a:solidFill>
+                    <a:schemeClr val="tx1"/>
+                  </a:solidFill>
+                </a:ln>
+                <a:solidFill>
+                  <a:schemeClr val="accent4"/>
+                </a:solidFill>
+              </a:rPr>
+              <a:t>BD</a:t>
+            </a:r>
+          </a:p>
+        </p:txBody>
+      </p:sp>
+      <p:cxnSp>
+        <p:nvCxnSpPr>
+          <p:cNvPr id="11" name="Conector recto de flecha 10">
+            <a:extLst>
+              <a:ext uri="{FF2B5EF4-FFF2-40B4-BE49-F238E27FC236}">
+                <a16:creationId xmlns:a16="http://schemas.microsoft.com/office/drawing/2014/main" id="{087C2656-72C0-0D9D-AD20-97CCCCA3F4AB}"/>
+              </a:ext>
+            </a:extLst>
+          </p:cNvPr>
+          <p:cNvCxnSpPr>
+            <a:stCxn id="9" idx="1"/>
+            <a:endCxn id="6" idx="2"/>
+          </p:cNvCxnSpPr>
+          <p:nvPr/>
+        </p:nvCxnSpPr>
+        <p:spPr>
+          <a:xfrm flipV="1">
+            <a:off x="5587048" y="3004794"/>
+            <a:ext cx="0" cy="1639454"/>
+          </a:xfrm>
+          <a:prstGeom prst="straightConnector1">
+            <a:avLst/>
+          </a:prstGeom>
+          <a:ln w="76200">
+            <a:tailEnd type="triangle"/>
+          </a:ln>
+        </p:spPr>
+        <p:style>
+          <a:lnRef idx="3">
+            <a:schemeClr val="accent4"/>
+          </a:lnRef>
+          <a:fillRef idx="0">
+            <a:schemeClr val="accent4"/>
+          </a:fillRef>
+          <a:effectRef idx="2">
+            <a:schemeClr val="accent4"/>
+          </a:effectRef>
+          <a:fontRef idx="minor">
+            <a:schemeClr val="tx1"/>
+          </a:fontRef>
+        </p:style>
+      </p:cxnSp>
+      <p:sp>
+        <p:nvSpPr>
+          <p:cNvPr id="13" name="Flecha: a la derecha 12">
+            <a:extLst>
+              <a:ext uri="{FF2B5EF4-FFF2-40B4-BE49-F238E27FC236}">
+                <a16:creationId xmlns:a16="http://schemas.microsoft.com/office/drawing/2014/main" id="{8D16E0D6-646A-A0F1-3F73-FC9CA2059D74}"/>
+              </a:ext>
+            </a:extLst>
+          </p:cNvPr>
+          <p:cNvSpPr/>
+          <p:nvPr/>
+        </p:nvSpPr>
+        <p:spPr>
+          <a:xfrm>
+            <a:off x="7352458" y="1460073"/>
+            <a:ext cx="1265382" cy="1108364"/>
+          </a:xfrm>
+          <a:prstGeom prst="rightArrow">
+            <a:avLst/>
+          </a:prstGeom>
+        </p:spPr>
+        <p:style>
+          <a:lnRef idx="2">
+            <a:schemeClr val="accent1">
+              <a:shade val="15000"/>
+            </a:schemeClr>
+          </a:lnRef>
+          <a:fillRef idx="1">
+            <a:schemeClr val="accent1"/>
+          </a:fillRef>
+          <a:effectRef idx="0">
+            <a:schemeClr val="accent1"/>
+          </a:effectRef>
+          <a:fontRef idx="minor">
+            <a:schemeClr val="lt1"/>
+          </a:fontRef>
+        </p:style>
+        <p:txBody>
+          <a:bodyPr rtlCol="0" anchor="ctr"/>
+          <a:lstStyle/>
+          <a:p>
+            <a:pPr algn="ctr"/>
+            <a:endParaRPr lang="es-ES"/>
+          </a:p>
+        </p:txBody>
+      </p:sp>
+      <p:sp>
+        <p:nvSpPr>
+          <p:cNvPr id="14" name="CuadroTexto 13">
+            <a:extLst>
+              <a:ext uri="{FF2B5EF4-FFF2-40B4-BE49-F238E27FC236}">
+                <a16:creationId xmlns:a16="http://schemas.microsoft.com/office/drawing/2014/main" id="{51F5041E-00B8-E0BE-4D28-B8F350CEEF0F}"/>
+              </a:ext>
+            </a:extLst>
+          </p:cNvPr>
+          <p:cNvSpPr txBox="1"/>
+          <p:nvPr/>
+        </p:nvSpPr>
+        <p:spPr>
+          <a:xfrm>
+            <a:off x="8729940" y="1348623"/>
+            <a:ext cx="2901227" cy="1331263"/>
+          </a:xfrm>
+          <a:prstGeom prst="rect">
+            <a:avLst/>
+          </a:prstGeom>
+          <a:noFill/>
+        </p:spPr>
+        <p:txBody>
+          <a:bodyPr wrap="square" rtlCol="0" anchor="ctr" anchorCtr="0">
+            <a:normAutofit/>
+          </a:bodyPr>
+          <a:lstStyle/>
+          <a:p>
+            <a:r>
+              <a:rPr lang="es-ES" dirty="0" err="1"/>
+              <a:t>List</a:t>
+            </a:r>
+            <a:r>
+              <a:rPr lang="es-ES" dirty="0"/>
+              <a:t>&lt;</a:t>
+            </a:r>
+            <a:r>
+              <a:rPr lang="es-ES" dirty="0" err="1"/>
+              <a:t>AlumnoMatDto</a:t>
+            </a:r>
+            <a:r>
+              <a:rPr lang="es-ES" dirty="0"/>
+              <a:t>&gt;</a:t>
+            </a:r>
+          </a:p>
+        </p:txBody>
+      </p:sp>
+    </p:spTree>
+    <p:extLst>
+      <p:ext uri="{BB962C8B-B14F-4D97-AF65-F5344CB8AC3E}">
+        <p14:creationId xmlns:p14="http://schemas.microsoft.com/office/powerpoint/2010/main" val="3987080285"/>
+      </p:ext>
+    </p:extLst>
+  </p:cSld>
+  <p:clrMapOvr>
+    <a:masterClrMapping/>
+  </p:clrMapOvr>
+</p:sld>
+</file>
+
+<file path=ppt/slides/slide3.xml><?xml version="1.0" encoding="utf-8"?>
+<p:sld xmlns:a="http://schemas.openxmlformats.org/drawingml/2006/main" xmlns:r="http://schemas.openxmlformats.org/officeDocument/2006/relationships" xmlns:p="http://schemas.openxmlformats.org/presentationml/2006/main">
+  <p:cSld>
+    <p:spTree>
+      <p:nvGrpSpPr>
         <p:cNvPr id="1" name="">
           <a:extLst>
             <a:ext uri="{FF2B5EF4-FFF2-40B4-BE49-F238E27FC236}">
@@ -3847,7 +4232,7 @@
 </p:sld>
 </file>
 
-<file path=ppt/slides/slide3.xml><?xml version="1.0" encoding="utf-8"?>
+<file path=ppt/slides/slide4.xml><?xml version="1.0" encoding="utf-8"?>
 <p:sld xmlns:a="http://schemas.openxmlformats.org/drawingml/2006/main" xmlns:r="http://schemas.openxmlformats.org/officeDocument/2006/relationships" xmlns:p="http://schemas.openxmlformats.org/presentationml/2006/main">
   <p:cSld>
     <p:spTree>
